--- a/classes/parte-17-profundizacion-para-certificaciones/317-seguridad-fisica-y-ambiental/clase-317-presentacion.pptx
+++ b/classes/parte-17-profundizacion-para-certificaciones/317-seguridad-fisica-y-ambiental/clase-317-presentacion.pptx
@@ -17,6 +17,10 @@
     <p:sldId id="265" r:id="rId16"/>
     <p:sldId id="266" r:id="rId17"/>
     <p:sldId id="267" r:id="rId18"/>
+    <p:sldId id="268" r:id="rId19"/>
+    <p:sldId id="269" r:id="rId20"/>
+    <p:sldId id="270" r:id="rId21"/>
+    <p:sldId id="271" r:id="rId22"/>
   </p:sldIdLst>
   <p:sldSz cx="9144000" cy="6858000" type="screen4x3"/>
   <p:notesSz cx="6858000" cy="9144000"/>
@@ -3198,7 +3202,7 @@
                   <a:srgbClr val="0B3D2E"/>
                 </a:solidFill>
               </a:rPr>
-              <a:t>⚠️ Errores comunes</a:t>
+              <a:t>🧪 Laboratorio guiado — Evaluación física de una sala de servidores</a:t>
             </a:r>
           </a:p>
         </p:txBody>
@@ -3236,82 +3240,97 @@
                   <a:srgbClr val="22282E"/>
                 </a:solidFill>
               </a:rPr>
-              <a:t>•  "Tengo biometría pero entran extraños" — Tailgating: la biometría no impide que alguien pase detrás. Añade esclusa/torniquete y concienciación.</a:t>
-            </a:r>
-          </a:p>
-          <a:p>
-            <a:pPr>
-              <a:spcAft>
-                <a:spcPts val="600"/>
-              </a:spcAft>
-            </a:pPr>
-            <a:r>
-              <a:rPr sz="1500">
-                <a:solidFill>
-                  <a:srgbClr val="22282E"/>
-                </a:solidFill>
-              </a:rPr>
-              <a:t>•  "La sala se sobrecalienta pese al AC" — Mala gestión de flujo de aire (mezcla hot/cold aisle). Implementa contención de pasillos y paneles ciegos.</a:t>
-            </a:r>
-          </a:p>
-          <a:p>
-            <a:pPr>
-              <a:spcAft>
-                <a:spcPts val="600"/>
-              </a:spcAft>
-            </a:pPr>
-            <a:r>
-              <a:rPr sz="1500">
-                <a:solidFill>
-                  <a:srgbClr val="22282E"/>
-                </a:solidFill>
-              </a:rPr>
-              <a:t>•  "El generador no arrancó en el corte real" — Falta de pruebas periódicas con carga. Programa pruebas mensuales y mantenimiento del combustible.</a:t>
-            </a:r>
-          </a:p>
-          <a:p>
-            <a:pPr>
-              <a:spcAft>
-                <a:spcPts val="600"/>
-              </a:spcAft>
-            </a:pPr>
-            <a:r>
-              <a:rPr sz="1500">
-                <a:solidFill>
-                  <a:srgbClr val="22282E"/>
-                </a:solidFill>
-              </a:rPr>
-              <a:t>•  "Instalaron sprinklers sobre los racks" — El agua destruye electrónica. Evalúa clean agent (FM-200/Novec) o pre-action para salas de TI.</a:t>
-            </a:r>
-          </a:p>
-          <a:p>
-            <a:pPr>
-              <a:spcAft>
-                <a:spcPts val="600"/>
-              </a:spcAft>
-            </a:pPr>
-            <a:r>
-              <a:rPr sz="1500">
-                <a:solidFill>
-                  <a:srgbClr val="22282E"/>
-                </a:solidFill>
-              </a:rPr>
-              <a:t>•  "El botón EPO se activó por accidente" — EPO sin tapa/guarda. Añade cubierta protegida y señalización clara.</a:t>
-            </a:r>
-          </a:p>
-          <a:p>
-            <a:pPr>
-              <a:spcAft>
-                <a:spcPts val="600"/>
-              </a:spcAft>
-            </a:pPr>
-            <a:r>
-              <a:rPr sz="1500">
-                <a:solidFill>
-                  <a:srgbClr val="22282E"/>
-                </a:solidFill>
-              </a:rPr>
-              <a:t>•  "Las cámaras no cubren la puerta trasera" — Ángulos ciegos. Reubica cámaras y valida cobertura con recorrido físico.</a:t>
+              <a:t>•  Ejercicio aplicado: evaluarás (real o sobre plano) una sala de equipos y producirás un informe de hallazgos priorizado.</a:t>
+            </a:r>
+          </a:p>
+          <a:p>
+            <a:pPr>
+              <a:spcAft>
+                <a:spcPts val="600"/>
+              </a:spcAft>
+            </a:pPr>
+            <a:r>
+              <a:rPr sz="1500">
+                <a:solidFill>
+                  <a:srgbClr val="22282E"/>
+                </a:solidFill>
+              </a:rPr>
+              <a:t>•  Delimita el alcance. Elige la instalación (sala de servidores, MDF/IDF o datacenter pequeño) y obtén autorización. Documenta límites y activos protegidos.</a:t>
+            </a:r>
+          </a:p>
+          <a:p>
+            <a:pPr>
+              <a:spcAft>
+                <a:spcPts val="600"/>
+              </a:spcAft>
+            </a:pPr>
+            <a:r>
+              <a:rPr sz="1500">
+                <a:solidFill>
+                  <a:srgbClr val="22282E"/>
+                </a:solidFill>
+              </a:rPr>
+              <a:t>•  Mapea las capas. Sobre el plano, dibuja las capas de defensa: perímetro exterior, control de acceso al edificio, pasillo, puerta de la sala, gabinete/rack. Marca dónde hay control y dónde no.</a:t>
+            </a:r>
+          </a:p>
+          <a:p>
+            <a:pPr>
+              <a:spcAft>
+                <a:spcPts val="600"/>
+              </a:spcAft>
+            </a:pPr>
+            <a:r>
+              <a:rPr sz="1500">
+                <a:solidFill>
+                  <a:srgbClr val="22282E"/>
+                </a:solidFill>
+              </a:rPr>
+              <a:t>•  Evalúa acceso físico. Verifica: ¿badge + PIN o solo badge? ¿Hay esclusa o torniquete? ¿Puertas con cierre automático? Registra riesgo de tailgating en cada punto.</a:t>
+            </a:r>
+          </a:p>
+          <a:p>
+            <a:pPr>
+              <a:spcAft>
+                <a:spcPts val="600"/>
+              </a:spcAft>
+            </a:pPr>
+            <a:r>
+              <a:rPr sz="1500">
+                <a:solidFill>
+                  <a:srgbClr val="22282E"/>
+                </a:solidFill>
+              </a:rPr>
+              <a:t>•  Evalúa vigilancia. Ubica cámaras (cobertura, ángulos ciegos), iluminación, señalización territorial y retención de grabaciones (¿cumple política, p. ej. 30–90 días?).</a:t>
+            </a:r>
+          </a:p>
+          <a:p>
+            <a:pPr>
+              <a:spcAft>
+                <a:spcPts val="600"/>
+              </a:spcAft>
+            </a:pPr>
+            <a:r>
+              <a:rPr sz="1500">
+                <a:solidFill>
+                  <a:srgbClr val="22282E"/>
+                </a:solidFill>
+              </a:rPr>
+              <a:t>•  Mide condiciones ambientales. Toma temperatura y humedad en frente y detrás de los racks (hot/cold aisle). Compara con rango ASHRAE 18–27 °C / 40–60 % HR.</a:t>
+            </a:r>
+          </a:p>
+          <a:p>
+            <a:pPr>
+              <a:spcAft>
+                <a:spcPts val="600"/>
+              </a:spcAft>
+            </a:pPr>
+            <a:r>
+              <a:rPr sz="1500">
+                <a:solidFill>
+                  <a:srgbClr val="22282E"/>
+                </a:solidFill>
+              </a:rPr>
+              <a:t>•  Revisa energía. Confirma existencia de UPS, autonomía, prueba periódica del generador, PDUs redundantes (fuente A/B), y protección contra sobretensión.</a:t>
             </a:r>
           </a:p>
         </p:txBody>
@@ -3362,7 +3381,7 @@
                   <a:srgbClr val="0B3D2E"/>
                 </a:solidFill>
               </a:rPr>
-              <a:t>❓ Preguntas frecuentes</a:t>
+              <a:t>✍️ Ejercicios</a:t>
             </a:r>
           </a:p>
         </p:txBody>
@@ -3400,97 +3419,82 @@
                   <a:srgbClr val="22282E"/>
                 </a:solidFill>
               </a:rPr>
-              <a:t>•  ❓ ¿Cuál es la temperatura "correcta" de un datacenter?</a:t>
-            </a:r>
-          </a:p>
-          <a:p>
-            <a:pPr>
-              <a:spcAft>
-                <a:spcPts val="600"/>
-              </a:spcAft>
-            </a:pPr>
-            <a:r>
-              <a:rPr sz="1500">
-                <a:solidFill>
-                  <a:srgbClr val="22282E"/>
-                </a:solidFill>
-              </a:rPr>
-              <a:t>•  ASHRAE TC 9.9 recomienda un rango recomendado de 18–27 °C y humedad relativa de 40–60 %. Operar más fresco gasta energía sin beneficio; más caliente acorta la vida del hardware.</a:t>
-            </a:r>
-          </a:p>
-          <a:p>
-            <a:pPr>
-              <a:spcAft>
-                <a:spcPts val="600"/>
-              </a:spcAft>
-            </a:pPr>
-            <a:r>
-              <a:rPr sz="1500">
-                <a:solidFill>
-                  <a:srgbClr val="22282E"/>
-                </a:solidFill>
-              </a:rPr>
-              <a:t>•  ❓ ¿UPS o generador?</a:t>
-            </a:r>
-          </a:p>
-          <a:p>
-            <a:pPr>
-              <a:spcAft>
-                <a:spcPts val="600"/>
-              </a:spcAft>
-            </a:pPr>
-            <a:r>
-              <a:rPr sz="1500">
-                <a:solidFill>
-                  <a:srgbClr val="22282E"/>
-                </a:solidFill>
-              </a:rPr>
-              <a:t>•  Ambos. El UPS cubre los segundos hasta que el generador arranca y acondiciona la energía; el generador provee autonomía prolongada. Son capas complementarias, no alternativas.</a:t>
-            </a:r>
-          </a:p>
-          <a:p>
-            <a:pPr>
-              <a:spcAft>
-                <a:spcPts val="600"/>
-              </a:spcAft>
-            </a:pPr>
-            <a:r>
-              <a:rPr sz="1500">
-                <a:solidFill>
-                  <a:srgbClr val="22282E"/>
-                </a:solidFill>
-              </a:rPr>
-              <a:t>•  ❓ ¿Por qué CPTED antes que guardias y cámaras?</a:t>
-            </a:r>
-          </a:p>
-          <a:p>
-            <a:pPr>
-              <a:spcAft>
-                <a:spcPts val="600"/>
-              </a:spcAft>
-            </a:pPr>
-            <a:r>
-              <a:rPr sz="1500">
-                <a:solidFill>
-                  <a:srgbClr val="22282E"/>
-                </a:solidFill>
-              </a:rPr>
-              <a:t>•  Porque diseñar el entorno para disuadir y controlar accesos de forma natural reduce la carga sobre los controles activos (guardias, CCTV) y baja el costo total. La detección y respuesta se apoyan en un buen diseño de base.</a:t>
-            </a:r>
-          </a:p>
-          <a:p>
-            <a:pPr>
-              <a:spcAft>
-                <a:spcPts val="600"/>
-              </a:spcAft>
-            </a:pPr>
-            <a:r>
-              <a:rPr sz="1500">
-                <a:solidFill>
-                  <a:srgbClr val="22282E"/>
-                </a:solidFill>
-              </a:rPr>
-              <a:t>•  ❓ ¿Qué diferencia un Tier III de un Tier IV?</a:t>
+              <a:t>•  Aplica los 4 pilares de CPTED al diseño de un estacionamiento corporativo.</a:t>
+            </a:r>
+          </a:p>
+          <a:p>
+            <a:pPr>
+              <a:spcAft>
+                <a:spcPts val="600"/>
+              </a:spcAft>
+            </a:pPr>
+            <a:r>
+              <a:rPr sz="1500">
+                <a:solidFill>
+                  <a:srgbClr val="22282E"/>
+                </a:solidFill>
+              </a:rPr>
+              <a:t>•  Dibuja las capas de defensa en profundidad física de un datacenter Tier III.</a:t>
+            </a:r>
+          </a:p>
+          <a:p>
+            <a:pPr>
+              <a:spcAft>
+                <a:spcPts val="600"/>
+              </a:spcAft>
+            </a:pPr>
+            <a:r>
+              <a:rPr sz="1500">
+                <a:solidFill>
+                  <a:srgbClr val="22282E"/>
+                </a:solidFill>
+              </a:rPr>
+              <a:t>•  Explica tres controles concretos contra tailgating y su costo/fricción relativa.</a:t>
+            </a:r>
+          </a:p>
+          <a:p>
+            <a:pPr>
+              <a:spcAft>
+                <a:spcPts val="600"/>
+              </a:spcAft>
+            </a:pPr>
+            <a:r>
+              <a:rPr sz="1500">
+                <a:solidFill>
+                  <a:srgbClr val="22282E"/>
+                </a:solidFill>
+              </a:rPr>
+              <a:t>•  Calcula los minutos de autonomía de un UPS de 10 kVA con carga de 6 kW y banco de baterías dado (usa una hoja de cálculo).</a:t>
+            </a:r>
+          </a:p>
+          <a:p>
+            <a:pPr>
+              <a:spcAft>
+                <a:spcPts val="600"/>
+              </a:spcAft>
+            </a:pPr>
+            <a:r>
+              <a:rPr sz="1500">
+                <a:solidFill>
+                  <a:srgbClr val="22282E"/>
+                </a:solidFill>
+              </a:rPr>
+              <a:t>•  Compara supresión por agua, gas inerte y clean agent para una sala con personal presente.</a:t>
+            </a:r>
+          </a:p>
+          <a:p>
+            <a:pPr>
+              <a:spcAft>
+                <a:spcPts val="600"/>
+              </a:spcAft>
+            </a:pPr>
+            <a:r>
+              <a:rPr sz="1500">
+                <a:solidFill>
+                  <a:srgbClr val="22282E"/>
+                </a:solidFill>
+              </a:rPr>
+              <a:t>•  Justifica por qué un Tier IV usa topología 2N+1 y qué falla único tolera.</a:t>
             </a:r>
           </a:p>
         </p:txBody>
@@ -3541,7 +3545,7 @@
                   <a:srgbClr val="0B3D2E"/>
                 </a:solidFill>
               </a:rPr>
-              <a:t>🔗 Referencias</a:t>
+              <a:t>📝 Reto verificable</a:t>
             </a:r>
           </a:p>
         </p:txBody>
@@ -3579,6 +3583,513 @@
                   <a:srgbClr val="22282E"/>
                 </a:solidFill>
               </a:rPr>
+              <a:t>•  Reto: produce el informe de evaluación física de una sala de equipos (real o sobre plano) con mapa de capas y tabla de hallazgos priorizada.</a:t>
+            </a:r>
+          </a:p>
+          <a:p>
+            <a:pPr>
+              <a:spcAft>
+                <a:spcPts val="600"/>
+              </a:spcAft>
+            </a:pPr>
+            <a:r>
+              <a:rPr sz="1500">
+                <a:solidFill>
+                  <a:srgbClr val="22282E"/>
+                </a:solidFill>
+              </a:rPr>
+              <a:t>•  Criterio de aceptación:</a:t>
+            </a:r>
+          </a:p>
+          <a:p>
+            <a:pPr>
+              <a:spcAft>
+                <a:spcPts val="600"/>
+              </a:spcAft>
+            </a:pPr>
+            <a:r>
+              <a:rPr sz="1500">
+                <a:solidFill>
+                  <a:srgbClr val="22282E"/>
+                </a:solidFill>
+              </a:rPr>
+              <a:t>•  El mapa muestra al menos 4 capas de defensa en profundidad.</a:t>
+            </a:r>
+          </a:p>
+          <a:p>
+            <a:pPr>
+              <a:spcAft>
+                <a:spcPts val="600"/>
+              </a:spcAft>
+            </a:pPr>
+            <a:r>
+              <a:rPr sz="1500">
+                <a:solidFill>
+                  <a:srgbClr val="22282E"/>
+                </a:solidFill>
+              </a:rPr>
+              <a:t>•  Cada hallazgo tiene estado, nivel de riesgo (P×I) y recomendación accionable.</a:t>
+            </a:r>
+          </a:p>
+          <a:p>
+            <a:pPr>
+              <a:spcAft>
+                <a:spcPts val="600"/>
+              </a:spcAft>
+            </a:pPr>
+            <a:r>
+              <a:rPr sz="1500">
+                <a:solidFill>
+                  <a:srgbClr val="22282E"/>
+                </a:solidFill>
+              </a:rPr>
+              <a:t>•  Se evalúan las tres dimensiones ambientales: acceso, clima (HVAC) y energía.</a:t>
+            </a:r>
+          </a:p>
+          <a:p>
+            <a:pPr>
+              <a:spcAft>
+                <a:spcPts val="600"/>
+              </a:spcAft>
+            </a:pPr>
+            <a:r>
+              <a:rPr sz="1500">
+                <a:solidFill>
+                  <a:srgbClr val="22282E"/>
+                </a:solidFill>
+              </a:rPr>
+              <a:t>•  Cada recomendación referencia un control de la familia PE de NIST SP 800-53.</a:t>
+            </a:r>
+          </a:p>
+        </p:txBody>
+      </p:sp>
+    </p:spTree>
+  </p:cSld>
+  <p:clrMapOvr>
+    <a:masterClrMapping/>
+  </p:clrMapOvr>
+</p:sld>
+</file>
+
+<file path=ppt/slides/slide13.xml><?xml version="1.0" encoding="utf-8"?>
+<p:sld xmlns:a="http://schemas.openxmlformats.org/drawingml/2006/main" xmlns:p="http://schemas.openxmlformats.org/presentationml/2006/main" xmlns:r="http://schemas.openxmlformats.org/officeDocument/2006/relationships">
+  <p:cSld>
+    <p:spTree>
+      <p:nvGrpSpPr>
+        <p:cNvPr id="1" name=""/>
+        <p:cNvGrpSpPr/>
+        <p:nvPr/>
+      </p:nvGrpSpPr>
+      <p:grpSpPr/>
+      <p:sp>
+        <p:nvSpPr>
+          <p:cNvPr id="2" name="TextBox 1"/>
+          <p:cNvSpPr txBox="1"/>
+          <p:nvPr/>
+        </p:nvSpPr>
+        <p:spPr>
+          <a:xfrm>
+            <a:off x="457200" y="320040"/>
+            <a:ext cx="8229600" cy="822960"/>
+          </a:xfrm>
+          <a:prstGeom prst="rect">
+            <a:avLst/>
+          </a:prstGeom>
+          <a:noFill/>
+        </p:spPr>
+        <p:txBody>
+          <a:bodyPr wrap="square">
+            <a:spAutoFit/>
+          </a:bodyPr>
+          <a:lstStyle/>
+          <a:p>
+            <a:r>
+              <a:rPr sz="2600" b="1">
+                <a:solidFill>
+                  <a:srgbClr val="0B3D2E"/>
+                </a:solidFill>
+              </a:rPr>
+              <a:t>⚠️ Errores comunes</a:t>
+            </a:r>
+          </a:p>
+        </p:txBody>
+      </p:sp>
+      <p:sp>
+        <p:nvSpPr>
+          <p:cNvPr id="3" name="TextBox 2"/>
+          <p:cNvSpPr txBox="1"/>
+          <p:nvPr/>
+        </p:nvSpPr>
+        <p:spPr>
+          <a:xfrm>
+            <a:off x="457200" y="1280160"/>
+            <a:ext cx="8229600" cy="4937760"/>
+          </a:xfrm>
+          <a:prstGeom prst="rect">
+            <a:avLst/>
+          </a:prstGeom>
+          <a:noFill/>
+        </p:spPr>
+        <p:txBody>
+          <a:bodyPr wrap="square">
+            <a:spAutoFit/>
+          </a:bodyPr>
+          <a:lstStyle/>
+          <a:p>
+            <a:pPr>
+              <a:spcAft>
+                <a:spcPts val="600"/>
+              </a:spcAft>
+            </a:pPr>
+            <a:r>
+              <a:rPr sz="1500">
+                <a:solidFill>
+                  <a:srgbClr val="22282E"/>
+                </a:solidFill>
+              </a:rPr>
+              <a:t>•  "Tengo biometría pero entran extraños" — Tailgating: la biometría no impide que alguien pase detrás. Añade esclusa/torniquete y concienciación.</a:t>
+            </a:r>
+          </a:p>
+          <a:p>
+            <a:pPr>
+              <a:spcAft>
+                <a:spcPts val="600"/>
+              </a:spcAft>
+            </a:pPr>
+            <a:r>
+              <a:rPr sz="1500">
+                <a:solidFill>
+                  <a:srgbClr val="22282E"/>
+                </a:solidFill>
+              </a:rPr>
+              <a:t>•  "La sala se sobrecalienta pese al AC" — Mala gestión de flujo de aire (mezcla hot/cold aisle). Implementa contención de pasillos y paneles ciegos.</a:t>
+            </a:r>
+          </a:p>
+          <a:p>
+            <a:pPr>
+              <a:spcAft>
+                <a:spcPts val="600"/>
+              </a:spcAft>
+            </a:pPr>
+            <a:r>
+              <a:rPr sz="1500">
+                <a:solidFill>
+                  <a:srgbClr val="22282E"/>
+                </a:solidFill>
+              </a:rPr>
+              <a:t>•  "El generador no arrancó en el corte real" — Falta de pruebas periódicas con carga. Programa pruebas mensuales y mantenimiento del combustible.</a:t>
+            </a:r>
+          </a:p>
+          <a:p>
+            <a:pPr>
+              <a:spcAft>
+                <a:spcPts val="600"/>
+              </a:spcAft>
+            </a:pPr>
+            <a:r>
+              <a:rPr sz="1500">
+                <a:solidFill>
+                  <a:srgbClr val="22282E"/>
+                </a:solidFill>
+              </a:rPr>
+              <a:t>•  "Instalaron sprinklers sobre los racks" — El agua destruye electrónica. Evalúa clean agent (FM-200/Novec) o pre-action para salas de TI.</a:t>
+            </a:r>
+          </a:p>
+          <a:p>
+            <a:pPr>
+              <a:spcAft>
+                <a:spcPts val="600"/>
+              </a:spcAft>
+            </a:pPr>
+            <a:r>
+              <a:rPr sz="1500">
+                <a:solidFill>
+                  <a:srgbClr val="22282E"/>
+                </a:solidFill>
+              </a:rPr>
+              <a:t>•  "El botón EPO se activó por accidente" — EPO sin tapa/guarda. Añade cubierta protegida y señalización clara.</a:t>
+            </a:r>
+          </a:p>
+          <a:p>
+            <a:pPr>
+              <a:spcAft>
+                <a:spcPts val="600"/>
+              </a:spcAft>
+            </a:pPr>
+            <a:r>
+              <a:rPr sz="1500">
+                <a:solidFill>
+                  <a:srgbClr val="22282E"/>
+                </a:solidFill>
+              </a:rPr>
+              <a:t>•  "Las cámaras no cubren la puerta trasera" — Ángulos ciegos. Reubica cámaras y valida cobertura con recorrido físico.</a:t>
+            </a:r>
+          </a:p>
+        </p:txBody>
+      </p:sp>
+    </p:spTree>
+  </p:cSld>
+  <p:clrMapOvr>
+    <a:masterClrMapping/>
+  </p:clrMapOvr>
+</p:sld>
+</file>
+
+<file path=ppt/slides/slide14.xml><?xml version="1.0" encoding="utf-8"?>
+<p:sld xmlns:a="http://schemas.openxmlformats.org/drawingml/2006/main" xmlns:p="http://schemas.openxmlformats.org/presentationml/2006/main" xmlns:r="http://schemas.openxmlformats.org/officeDocument/2006/relationships">
+  <p:cSld>
+    <p:spTree>
+      <p:nvGrpSpPr>
+        <p:cNvPr id="1" name=""/>
+        <p:cNvGrpSpPr/>
+        <p:nvPr/>
+      </p:nvGrpSpPr>
+      <p:grpSpPr/>
+      <p:sp>
+        <p:nvSpPr>
+          <p:cNvPr id="2" name="TextBox 1"/>
+          <p:cNvSpPr txBox="1"/>
+          <p:nvPr/>
+        </p:nvSpPr>
+        <p:spPr>
+          <a:xfrm>
+            <a:off x="457200" y="320040"/>
+            <a:ext cx="8229600" cy="822960"/>
+          </a:xfrm>
+          <a:prstGeom prst="rect">
+            <a:avLst/>
+          </a:prstGeom>
+          <a:noFill/>
+        </p:spPr>
+        <p:txBody>
+          <a:bodyPr wrap="square">
+            <a:spAutoFit/>
+          </a:bodyPr>
+          <a:lstStyle/>
+          <a:p>
+            <a:r>
+              <a:rPr sz="2600" b="1">
+                <a:solidFill>
+                  <a:srgbClr val="0B3D2E"/>
+                </a:solidFill>
+              </a:rPr>
+              <a:t>❓ Preguntas frecuentes</a:t>
+            </a:r>
+          </a:p>
+        </p:txBody>
+      </p:sp>
+      <p:sp>
+        <p:nvSpPr>
+          <p:cNvPr id="3" name="TextBox 2"/>
+          <p:cNvSpPr txBox="1"/>
+          <p:nvPr/>
+        </p:nvSpPr>
+        <p:spPr>
+          <a:xfrm>
+            <a:off x="457200" y="1280160"/>
+            <a:ext cx="8229600" cy="4937760"/>
+          </a:xfrm>
+          <a:prstGeom prst="rect">
+            <a:avLst/>
+          </a:prstGeom>
+          <a:noFill/>
+        </p:spPr>
+        <p:txBody>
+          <a:bodyPr wrap="square">
+            <a:spAutoFit/>
+          </a:bodyPr>
+          <a:lstStyle/>
+          <a:p>
+            <a:pPr>
+              <a:spcAft>
+                <a:spcPts val="600"/>
+              </a:spcAft>
+            </a:pPr>
+            <a:r>
+              <a:rPr sz="1500">
+                <a:solidFill>
+                  <a:srgbClr val="22282E"/>
+                </a:solidFill>
+              </a:rPr>
+              <a:t>•  ❓ ¿Cuál es la temperatura "correcta" de un datacenter?</a:t>
+            </a:r>
+          </a:p>
+          <a:p>
+            <a:pPr>
+              <a:spcAft>
+                <a:spcPts val="600"/>
+              </a:spcAft>
+            </a:pPr>
+            <a:r>
+              <a:rPr sz="1500">
+                <a:solidFill>
+                  <a:srgbClr val="22282E"/>
+                </a:solidFill>
+              </a:rPr>
+              <a:t>•  ASHRAE TC 9.9 recomienda un rango recomendado de 18–27 °C y humedad relativa de 40–60 %. Operar más fresco gasta energía sin beneficio; más caliente acorta la vida del hardware.</a:t>
+            </a:r>
+          </a:p>
+          <a:p>
+            <a:pPr>
+              <a:spcAft>
+                <a:spcPts val="600"/>
+              </a:spcAft>
+            </a:pPr>
+            <a:r>
+              <a:rPr sz="1500">
+                <a:solidFill>
+                  <a:srgbClr val="22282E"/>
+                </a:solidFill>
+              </a:rPr>
+              <a:t>•  ❓ ¿UPS o generador?</a:t>
+            </a:r>
+          </a:p>
+          <a:p>
+            <a:pPr>
+              <a:spcAft>
+                <a:spcPts val="600"/>
+              </a:spcAft>
+            </a:pPr>
+            <a:r>
+              <a:rPr sz="1500">
+                <a:solidFill>
+                  <a:srgbClr val="22282E"/>
+                </a:solidFill>
+              </a:rPr>
+              <a:t>•  Ambos. El UPS cubre los segundos hasta que el generador arranca y acondiciona la energía; el generador provee autonomía prolongada. Son capas complementarias, no alternativas.</a:t>
+            </a:r>
+          </a:p>
+          <a:p>
+            <a:pPr>
+              <a:spcAft>
+                <a:spcPts val="600"/>
+              </a:spcAft>
+            </a:pPr>
+            <a:r>
+              <a:rPr sz="1500">
+                <a:solidFill>
+                  <a:srgbClr val="22282E"/>
+                </a:solidFill>
+              </a:rPr>
+              <a:t>•  ❓ ¿Por qué CPTED antes que guardias y cámaras?</a:t>
+            </a:r>
+          </a:p>
+          <a:p>
+            <a:pPr>
+              <a:spcAft>
+                <a:spcPts val="600"/>
+              </a:spcAft>
+            </a:pPr>
+            <a:r>
+              <a:rPr sz="1500">
+                <a:solidFill>
+                  <a:srgbClr val="22282E"/>
+                </a:solidFill>
+              </a:rPr>
+              <a:t>•  Porque diseñar el entorno para disuadir y controlar accesos de forma natural reduce la carga sobre los controles activos (guardias, CCTV) y baja el costo total. La detección y respuesta se apoyan en…</a:t>
+            </a:r>
+          </a:p>
+          <a:p>
+            <a:pPr>
+              <a:spcAft>
+                <a:spcPts val="600"/>
+              </a:spcAft>
+            </a:pPr>
+            <a:r>
+              <a:rPr sz="1500">
+                <a:solidFill>
+                  <a:srgbClr val="22282E"/>
+                </a:solidFill>
+              </a:rPr>
+              <a:t>•  ❓ ¿Qué diferencia un Tier III de un Tier IV?</a:t>
+            </a:r>
+          </a:p>
+        </p:txBody>
+      </p:sp>
+    </p:spTree>
+  </p:cSld>
+  <p:clrMapOvr>
+    <a:masterClrMapping/>
+  </p:clrMapOvr>
+</p:sld>
+</file>
+
+<file path=ppt/slides/slide15.xml><?xml version="1.0" encoding="utf-8"?>
+<p:sld xmlns:a="http://schemas.openxmlformats.org/drawingml/2006/main" xmlns:p="http://schemas.openxmlformats.org/presentationml/2006/main" xmlns:r="http://schemas.openxmlformats.org/officeDocument/2006/relationships">
+  <p:cSld>
+    <p:spTree>
+      <p:nvGrpSpPr>
+        <p:cNvPr id="1" name=""/>
+        <p:cNvGrpSpPr/>
+        <p:nvPr/>
+      </p:nvGrpSpPr>
+      <p:grpSpPr/>
+      <p:sp>
+        <p:nvSpPr>
+          <p:cNvPr id="2" name="TextBox 1"/>
+          <p:cNvSpPr txBox="1"/>
+          <p:nvPr/>
+        </p:nvSpPr>
+        <p:spPr>
+          <a:xfrm>
+            <a:off x="457200" y="320040"/>
+            <a:ext cx="8229600" cy="822960"/>
+          </a:xfrm>
+          <a:prstGeom prst="rect">
+            <a:avLst/>
+          </a:prstGeom>
+          <a:noFill/>
+        </p:spPr>
+        <p:txBody>
+          <a:bodyPr wrap="square">
+            <a:spAutoFit/>
+          </a:bodyPr>
+          <a:lstStyle/>
+          <a:p>
+            <a:r>
+              <a:rPr sz="2600" b="1">
+                <a:solidFill>
+                  <a:srgbClr val="0B3D2E"/>
+                </a:solidFill>
+              </a:rPr>
+              <a:t>🔗 Referencias</a:t>
+            </a:r>
+          </a:p>
+        </p:txBody>
+      </p:sp>
+      <p:sp>
+        <p:nvSpPr>
+          <p:cNvPr id="3" name="TextBox 2"/>
+          <p:cNvSpPr txBox="1"/>
+          <p:nvPr/>
+        </p:nvSpPr>
+        <p:spPr>
+          <a:xfrm>
+            <a:off x="457200" y="1280160"/>
+            <a:ext cx="8229600" cy="4937760"/>
+          </a:xfrm>
+          <a:prstGeom prst="rect">
+            <a:avLst/>
+          </a:prstGeom>
+          <a:noFill/>
+        </p:spPr>
+        <p:txBody>
+          <a:bodyPr wrap="square">
+            <a:spAutoFit/>
+          </a:bodyPr>
+          <a:lstStyle/>
+          <a:p>
+            <a:pPr>
+              <a:spcAft>
+                <a:spcPts val="600"/>
+              </a:spcAft>
+            </a:pPr>
+            <a:r>
+              <a:rPr sz="1500">
+                <a:solidFill>
+                  <a:srgbClr val="22282E"/>
+                </a:solidFill>
+              </a:rPr>
               <a:t>•  Chapple, Stewart &amp; Gibson. (ISC)² CISSP Official Study Guide, 9.ª ed., Sybex — Dominio 3 (Physical Security).</a:t>
             </a:r>
           </a:p>
@@ -3644,6 +4155,81 @@
           </a:p>
         </p:txBody>
       </p:sp>
+    </p:spTree>
+  </p:cSld>
+  <p:clrMapOvr>
+    <a:masterClrMapping/>
+  </p:clrMapOvr>
+</p:sld>
+</file>
+
+<file path=ppt/slides/slide16.xml><?xml version="1.0" encoding="utf-8"?>
+<p:sld xmlns:a="http://schemas.openxmlformats.org/drawingml/2006/main" xmlns:p="http://schemas.openxmlformats.org/presentationml/2006/main" xmlns:r="http://schemas.openxmlformats.org/officeDocument/2006/relationships">
+  <p:cSld>
+    <p:spTree>
+      <p:nvGrpSpPr>
+        <p:cNvPr id="1" name=""/>
+        <p:cNvGrpSpPr/>
+        <p:nvPr/>
+      </p:nvGrpSpPr>
+      <p:grpSpPr/>
+      <p:sp>
+        <p:nvSpPr>
+          <p:cNvPr id="2" name="TextBox 1"/>
+          <p:cNvSpPr txBox="1"/>
+          <p:nvPr/>
+        </p:nvSpPr>
+        <p:spPr>
+          <a:xfrm>
+            <a:off x="457200" y="274320"/>
+            <a:ext cx="8229600" cy="640080"/>
+          </a:xfrm>
+          <a:prstGeom prst="rect">
+            <a:avLst/>
+          </a:prstGeom>
+          <a:noFill/>
+        </p:spPr>
+        <p:txBody>
+          <a:bodyPr wrap="square">
+            <a:spAutoFit/>
+          </a:bodyPr>
+          <a:lstStyle/>
+          <a:p>
+            <a:r>
+              <a:rPr sz="2200" b="1">
+                <a:solidFill>
+                  <a:srgbClr val="0B3D2E"/>
+                </a:solidFill>
+              </a:rPr>
+              <a:t>Diagrama de la clase</a:t>
+            </a:r>
+          </a:p>
+        </p:txBody>
+      </p:sp>
+      <p:pic>
+        <p:nvPicPr>
+          <p:cNvPr id="3" name="Picture 2" descr="42502ff1864f6e5c.png"/>
+          <p:cNvPicPr>
+            <a:picLocks noChangeAspect="1"/>
+          </p:cNvPicPr>
+          <p:nvPr/>
+        </p:nvPicPr>
+        <p:blipFill>
+          <a:blip r:embed="rId2"/>
+          <a:stretch>
+            <a:fillRect/>
+          </a:stretch>
+        </p:blipFill>
+        <p:spPr>
+          <a:xfrm>
+            <a:off x="457200" y="3317202"/>
+            <a:ext cx="8229600" cy="863676"/>
+          </a:xfrm>
+          <a:prstGeom prst="rect">
+            <a:avLst/>
+          </a:prstGeom>
+        </p:spPr>
+      </p:pic>
     </p:spTree>
   </p:cSld>
   <p:clrMapOvr>
@@ -3728,7 +4314,7 @@
                   <a:srgbClr val="22282E"/>
                 </a:solidFill>
               </a:rPr>
-              <a:t>•  Diseñar y evaluar controles de seguridad física y ambiental que protegen personas, equipos e información en instalaciones y centros de datos. La seguridad lógica se derrumba si alguien puede entrar a la sala de servidores; esta clase cubre desde CPTED y defensa en profundidad perimetral hasta HVAC, energía redundante y controles de acceso físico —temas del dominio de Physical Security de CISSP y Security+.</a:t>
+              <a:t>•  Diseñar y evaluar controles de seguridad física y ambiental que protegen personas, equipos e información en instalaciones y centros de datos. La seguridad lógica se derrumba si alguien puede entrar a…</a:t>
             </a:r>
           </a:p>
         </p:txBody>
@@ -4122,7 +4708,7 @@
                   <a:srgbClr val="0B3D2E"/>
                 </a:solidFill>
               </a:rPr>
-              <a:t>📖 Definiciones y características</a:t>
+              <a:t>🧠 Modelo mental y caso de decisión</a:t>
             </a:r>
           </a:p>
         </p:txBody>
@@ -4160,97 +4746,22 @@
                   <a:srgbClr val="22282E"/>
                 </a:solidFill>
               </a:rPr>
-              <a:t>•  CPTED: metodología de diseño que reduce el delito mediante el entorno físico. Sus pilares son vigilancia natural, control natural de accesos, refuerzo territorial y mantenimiento. Característica clave: la prevención empieza en la arquitectura del sitio, no en el guardia.</a:t>
-            </a:r>
-          </a:p>
-          <a:p>
-            <a:pPr>
-              <a:spcAft>
-                <a:spcPts val="600"/>
-              </a:spcAft>
-            </a:pPr>
-            <a:r>
-              <a:rPr sz="1500">
-                <a:solidFill>
-                  <a:srgbClr val="22282E"/>
-                </a:solidFill>
-              </a:rPr>
-              <a:t>•  Defensa en profundidad física: capas concéntricas (cerca perimetral, iluminación, CCTV, recepción, puertas, sala, rack). Característica clave: fallar una capa no compromete el activo.</a:t>
-            </a:r>
-          </a:p>
-          <a:p>
-            <a:pPr>
-              <a:spcAft>
-                <a:spcPts val="600"/>
-              </a:spcAft>
-            </a:pPr>
-            <a:r>
-              <a:rPr sz="1500">
-                <a:solidFill>
-                  <a:srgbClr val="22282E"/>
-                </a:solidFill>
-              </a:rPr>
-              <a:t>•  Mantrap / esclusa (access control vestibule): doble puerta interbloqueada donde solo se abre una a la vez, con verificación entre ambas. Característica clave: neutraliza el tailgating.</a:t>
-            </a:r>
-          </a:p>
-          <a:p>
-            <a:pPr>
-              <a:spcAft>
-                <a:spcPts val="600"/>
-              </a:spcAft>
-            </a:pPr>
-            <a:r>
-              <a:rPr sz="1500">
-                <a:solidFill>
-                  <a:srgbClr val="22282E"/>
-                </a:solidFill>
-              </a:rPr>
-              <a:t>•  Tailgating (piggybacking): una persona no autorizada sigue a una autorizada a través de una puerta. Característica clave: derrota badges y biometría; se mitiga con esclusas, torniquetes y concienciación.</a:t>
-            </a:r>
-          </a:p>
-          <a:p>
-            <a:pPr>
-              <a:spcAft>
-                <a:spcPts val="600"/>
-              </a:spcAft>
-            </a:pPr>
-            <a:r>
-              <a:rPr sz="1500">
-                <a:solidFill>
-                  <a:srgbClr val="22282E"/>
-                </a:solidFill>
-              </a:rPr>
-              <a:t>•  HVAC (Heating, Ventilation, Air Conditioning): sistema que mantiene temperatura (~18–27 °C según ASHRAE) y humedad relativa (40–60 %). Característica clave: exceso de humedad → corrosión; defecto → electricidad estática.</a:t>
-            </a:r>
-          </a:p>
-          <a:p>
-            <a:pPr>
-              <a:spcAft>
-                <a:spcPts val="600"/>
-              </a:spcAft>
-            </a:pPr>
-            <a:r>
-              <a:rPr sz="1500">
-                <a:solidFill>
-                  <a:srgbClr val="22282E"/>
-                </a:solidFill>
-              </a:rPr>
-              <a:t>•  UPS (Uninterruptible Power Supply): batería que cubre el corte hasta que arranca el generador y acondiciona la energía (sags, spikes, brownouts). Característica clave: puente de segundos-minutos, no autonomía prolongada.</a:t>
-            </a:r>
-          </a:p>
-          <a:p>
-            <a:pPr>
-              <a:spcAft>
-                <a:spcPts val="600"/>
-              </a:spcAft>
-            </a:pPr>
-            <a:r>
-              <a:rPr sz="1500">
-                <a:solidFill>
-                  <a:srgbClr val="22282E"/>
-                </a:solidFill>
-              </a:rPr>
-              <a:t>•  Supresión limpia (clean agent, p. ej. FM-200/Novec 1230): apaga incendios sin residuos ni daño a electrónica, a diferencia del agua. Característica clave: protege equipos; requiere control de descarga por concentración de O₂.</a:t>
+              <a:t>•  La seguridad física diseña disuasión, detección, demora, respuesta y recuperación alrededor de personas y activos.</a:t>
+            </a:r>
+          </a:p>
+          <a:p>
+            <a:pPr>
+              <a:spcAft>
+                <a:spcPts val="600"/>
+              </a:spcAft>
+            </a:pPr>
+            <a:r>
+              <a:rPr sz="1500">
+                <a:solidFill>
+                  <a:srgbClr val="22282E"/>
+                </a:solidFill>
+              </a:rPr>
+              <a:t>•  Caso razonado. Una puerta fuerte carece de alerta y procedimiento; el tiempo de demora no produce seguridad sin respuesta.</a:t>
             </a:r>
           </a:p>
         </p:txBody>
@@ -4301,7 +4812,7 @@
                   <a:srgbClr val="0B3D2E"/>
                 </a:solidFill>
               </a:rPr>
-              <a:t>🧰 Herramientas y preparación</a:t>
+              <a:t>📔 Glosario operativo complementario</a:t>
             </a:r>
           </a:p>
         </p:txBody>
@@ -4339,82 +4850,52 @@
                   <a:srgbClr val="22282E"/>
                 </a:solidFill>
               </a:rPr>
-              <a:t>•  Clase de evaluación de instalaciones; herramientas de campo y documentación:</a:t>
-            </a:r>
-          </a:p>
-          <a:p>
-            <a:pPr>
-              <a:spcAft>
-                <a:spcPts val="600"/>
-              </a:spcAft>
-            </a:pPr>
-            <a:r>
-              <a:rPr sz="1500">
-                <a:solidFill>
-                  <a:srgbClr val="22282E"/>
-                </a:solidFill>
-              </a:rPr>
-              <a:t>•  Plano del sitio / floor plan (draw.io o PDF del edificio) para marcar capas y controles.</a:t>
-            </a:r>
-          </a:p>
-          <a:p>
-            <a:pPr>
-              <a:spcAft>
-                <a:spcPts val="600"/>
-              </a:spcAft>
-            </a:pPr>
-            <a:r>
-              <a:rPr sz="1500">
-                <a:solidFill>
-                  <a:srgbClr val="22282E"/>
-                </a:solidFill>
-              </a:rPr>
-              <a:t>•  Lista de verificación basada en NIST SP 800-53 (familia PE — Physical and Environmental Protection).</a:t>
-            </a:r>
-          </a:p>
-          <a:p>
-            <a:pPr>
-              <a:spcAft>
-                <a:spcPts val="600"/>
-              </a:spcAft>
-            </a:pPr>
-            <a:r>
-              <a:rPr sz="1500">
-                <a:solidFill>
-                  <a:srgbClr val="22282E"/>
-                </a:solidFill>
-              </a:rPr>
-              <a:t>•  Termómetro/higrómetro o sensor IoT para medir condiciones reales de una sala de equipos.</a:t>
-            </a:r>
-          </a:p>
-          <a:p>
-            <a:pPr>
-              <a:spcAft>
-                <a:spcPts val="600"/>
-              </a:spcAft>
-            </a:pPr>
-            <a:r>
-              <a:rPr sz="1500">
-                <a:solidFill>
-                  <a:srgbClr val="22282E"/>
-                </a:solidFill>
-              </a:rPr>
-              <a:t>•  Cámara para documentar hallazgos (con autorización de la organización).</a:t>
-            </a:r>
-          </a:p>
-          <a:p>
-            <a:pPr>
-              <a:spcAft>
-                <a:spcPts val="600"/>
-              </a:spcAft>
-            </a:pPr>
-            <a:r>
-              <a:rPr sz="1500">
-                <a:solidFill>
-                  <a:srgbClr val="22282E"/>
-                </a:solidFill>
-              </a:rPr>
-              <a:t>•  Estándar ASHRAE TC 9.9 como referencia de rangos térmicos para datacenters.</a:t>
+              <a:t>•  Término — Definición</a:t>
+            </a:r>
+          </a:p>
+          <a:p>
+            <a:pPr>
+              <a:spcAft>
+                <a:spcPts val="600"/>
+              </a:spcAft>
+            </a:pPr>
+            <a:r>
+              <a:rPr sz="1500">
+                <a:solidFill>
+                  <a:srgbClr val="22282E"/>
+                </a:solidFill>
+              </a:rPr>
+              <a:t>•  Evidencia — Información cuya procedencia y relación con un criterio pueden revisarse.</a:t>
+            </a:r>
+          </a:p>
+          <a:p>
+            <a:pPr>
+              <a:spcAft>
+                <a:spcPts val="600"/>
+              </a:spcAft>
+            </a:pPr>
+            <a:r>
+              <a:rPr sz="1500">
+                <a:solidFill>
+                  <a:srgbClr val="22282E"/>
+                </a:solidFill>
+              </a:rPr>
+              <a:t>•  Supuesto — Condición declarada de la que depende una conclusión.</a:t>
+            </a:r>
+          </a:p>
+          <a:p>
+            <a:pPr>
+              <a:spcAft>
+                <a:spcPts val="600"/>
+              </a:spcAft>
+            </a:pPr>
+            <a:r>
+              <a:rPr sz="1500">
+                <a:solidFill>
+                  <a:srgbClr val="22282E"/>
+                </a:solidFill>
+              </a:rPr>
+              <a:t>•  Riesgo residual — Exposición que permanece después del tratamiento.</a:t>
             </a:r>
           </a:p>
         </p:txBody>
@@ -4465,7 +4946,7 @@
                   <a:srgbClr val="0B3D2E"/>
                 </a:solidFill>
               </a:rPr>
-              <a:t>🧪 Laboratorio guiado — Evaluación física de una sala de servidores</a:t>
+              <a:t>✅ Criterio de dominio</a:t>
             </a:r>
           </a:p>
         </p:txBody>
@@ -4503,97 +4984,7 @@
                   <a:srgbClr val="22282E"/>
                 </a:solidFill>
               </a:rPr>
-              <a:t>•  Ejercicio aplicado: evaluarás (real o sobre plano) una sala de equipos y producirás un informe de hallazgos priorizado.</a:t>
-            </a:r>
-          </a:p>
-          <a:p>
-            <a:pPr>
-              <a:spcAft>
-                <a:spcPts val="600"/>
-              </a:spcAft>
-            </a:pPr>
-            <a:r>
-              <a:rPr sz="1500">
-                <a:solidFill>
-                  <a:srgbClr val="22282E"/>
-                </a:solidFill>
-              </a:rPr>
-              <a:t>•  Delimita el alcance. Elige la instalación (sala de servidores, MDF/IDF o datacenter pequeño) y obtén autorización. Documenta límites y activos protegidos.</a:t>
-            </a:r>
-          </a:p>
-          <a:p>
-            <a:pPr>
-              <a:spcAft>
-                <a:spcPts val="600"/>
-              </a:spcAft>
-            </a:pPr>
-            <a:r>
-              <a:rPr sz="1500">
-                <a:solidFill>
-                  <a:srgbClr val="22282E"/>
-                </a:solidFill>
-              </a:rPr>
-              <a:t>•  Mapea las capas. Sobre el plano, dibuja las capas de defensa: perímetro exterior, control de acceso al edificio, pasillo, puerta de la sala, gabinete/rack. Marca dónde hay control y dónde no.</a:t>
-            </a:r>
-          </a:p>
-          <a:p>
-            <a:pPr>
-              <a:spcAft>
-                <a:spcPts val="600"/>
-              </a:spcAft>
-            </a:pPr>
-            <a:r>
-              <a:rPr sz="1500">
-                <a:solidFill>
-                  <a:srgbClr val="22282E"/>
-                </a:solidFill>
-              </a:rPr>
-              <a:t>•  Evalúa acceso físico. Verifica: ¿badge + PIN o solo badge? ¿Hay esclusa o torniquete? ¿Puertas con cierre automático? Registra riesgo de tailgating en cada punto.</a:t>
-            </a:r>
-          </a:p>
-          <a:p>
-            <a:pPr>
-              <a:spcAft>
-                <a:spcPts val="600"/>
-              </a:spcAft>
-            </a:pPr>
-            <a:r>
-              <a:rPr sz="1500">
-                <a:solidFill>
-                  <a:srgbClr val="22282E"/>
-                </a:solidFill>
-              </a:rPr>
-              <a:t>•  Evalúa vigilancia. Ubica cámaras (cobertura, ángulos ciegos), iluminación, señalización territorial y retención de grabaciones (¿cumple política, p. ej. 30–90 días?).</a:t>
-            </a:r>
-          </a:p>
-          <a:p>
-            <a:pPr>
-              <a:spcAft>
-                <a:spcPts val="600"/>
-              </a:spcAft>
-            </a:pPr>
-            <a:r>
-              <a:rPr sz="1500">
-                <a:solidFill>
-                  <a:srgbClr val="22282E"/>
-                </a:solidFill>
-              </a:rPr>
-              <a:t>•  Mide condiciones ambientales. Toma temperatura y humedad en frente y detrás de los racks (hot/cold aisle). Compara con rango ASHRAE 18–27 °C / 40–60 % HR.</a:t>
-            </a:r>
-          </a:p>
-          <a:p>
-            <a:pPr>
-              <a:spcAft>
-                <a:spcPts val="600"/>
-              </a:spcAft>
-            </a:pPr>
-            <a:r>
-              <a:rPr sz="1500">
-                <a:solidFill>
-                  <a:srgbClr val="22282E"/>
-                </a:solidFill>
-              </a:rPr>
-              <a:t>•  Revisa energía. Confirma existencia de UPS, autonomía, prueba periódica del generador, PDUs redundantes (fuente A/B), y protección contra sobretensión.</a:t>
+              <a:t>•  El alumno demuestra dominio cuando explica el diagrama, resuelve el caso con evidencia, declara límites y puede defender por qué su decisión cambia si cambia un supuesto.</a:t>
             </a:r>
           </a:p>
         </p:txBody>
@@ -4644,7 +5035,7 @@
                   <a:srgbClr val="0B3D2E"/>
                 </a:solidFill>
               </a:rPr>
-              <a:t>✍️ Ejercicios</a:t>
+              <a:t>📖 Definiciones y características</a:t>
             </a:r>
           </a:p>
         </p:txBody>
@@ -4682,82 +5073,97 @@
                   <a:srgbClr val="22282E"/>
                 </a:solidFill>
               </a:rPr>
-              <a:t>•  Aplica los 4 pilares de CPTED al diseño de un estacionamiento corporativo.</a:t>
-            </a:r>
-          </a:p>
-          <a:p>
-            <a:pPr>
-              <a:spcAft>
-                <a:spcPts val="600"/>
-              </a:spcAft>
-            </a:pPr>
-            <a:r>
-              <a:rPr sz="1500">
-                <a:solidFill>
-                  <a:srgbClr val="22282E"/>
-                </a:solidFill>
-              </a:rPr>
-              <a:t>•  Dibuja las capas de defensa en profundidad física de un datacenter Tier III.</a:t>
-            </a:r>
-          </a:p>
-          <a:p>
-            <a:pPr>
-              <a:spcAft>
-                <a:spcPts val="600"/>
-              </a:spcAft>
-            </a:pPr>
-            <a:r>
-              <a:rPr sz="1500">
-                <a:solidFill>
-                  <a:srgbClr val="22282E"/>
-                </a:solidFill>
-              </a:rPr>
-              <a:t>•  Explica tres controles concretos contra tailgating y su costo/fricción relativa.</a:t>
-            </a:r>
-          </a:p>
-          <a:p>
-            <a:pPr>
-              <a:spcAft>
-                <a:spcPts val="600"/>
-              </a:spcAft>
-            </a:pPr>
-            <a:r>
-              <a:rPr sz="1500">
-                <a:solidFill>
-                  <a:srgbClr val="22282E"/>
-                </a:solidFill>
-              </a:rPr>
-              <a:t>•  Calcula los minutos de autonomía de un UPS de 10 kVA con carga de 6 kW y banco de baterías dado (usa una hoja de cálculo).</a:t>
-            </a:r>
-          </a:p>
-          <a:p>
-            <a:pPr>
-              <a:spcAft>
-                <a:spcPts val="600"/>
-              </a:spcAft>
-            </a:pPr>
-            <a:r>
-              <a:rPr sz="1500">
-                <a:solidFill>
-                  <a:srgbClr val="22282E"/>
-                </a:solidFill>
-              </a:rPr>
-              <a:t>•  Compara supresión por agua, gas inerte y clean agent para una sala con personal presente.</a:t>
-            </a:r>
-          </a:p>
-          <a:p>
-            <a:pPr>
-              <a:spcAft>
-                <a:spcPts val="600"/>
-              </a:spcAft>
-            </a:pPr>
-            <a:r>
-              <a:rPr sz="1500">
-                <a:solidFill>
-                  <a:srgbClr val="22282E"/>
-                </a:solidFill>
-              </a:rPr>
-              <a:t>•  Justifica por qué un Tier IV usa topología 2N+1 y qué falla único tolera.</a:t>
+              <a:t>•  CPTED: metodología de diseño que reduce el delito mediante el entorno físico. Sus pilares son vigilancia natural, control natural de accesos, refuerzo territorial y mantenimiento. Característica…</a:t>
+            </a:r>
+          </a:p>
+          <a:p>
+            <a:pPr>
+              <a:spcAft>
+                <a:spcPts val="600"/>
+              </a:spcAft>
+            </a:pPr>
+            <a:r>
+              <a:rPr sz="1500">
+                <a:solidFill>
+                  <a:srgbClr val="22282E"/>
+                </a:solidFill>
+              </a:rPr>
+              <a:t>•  Defensa en profundidad física: capas concéntricas (cerca perimetral, iluminación, CCTV, recepción, puertas, sala, rack). Característica clave: fallar una capa no compromete el activo.</a:t>
+            </a:r>
+          </a:p>
+          <a:p>
+            <a:pPr>
+              <a:spcAft>
+                <a:spcPts val="600"/>
+              </a:spcAft>
+            </a:pPr>
+            <a:r>
+              <a:rPr sz="1500">
+                <a:solidFill>
+                  <a:srgbClr val="22282E"/>
+                </a:solidFill>
+              </a:rPr>
+              <a:t>•  Mantrap / esclusa (access control vestibule): doble puerta interbloqueada donde solo se abre una a la vez, con verificación entre ambas. Característica clave: neutraliza el tailgating.</a:t>
+            </a:r>
+          </a:p>
+          <a:p>
+            <a:pPr>
+              <a:spcAft>
+                <a:spcPts val="600"/>
+              </a:spcAft>
+            </a:pPr>
+            <a:r>
+              <a:rPr sz="1500">
+                <a:solidFill>
+                  <a:srgbClr val="22282E"/>
+                </a:solidFill>
+              </a:rPr>
+              <a:t>•  Tailgating (piggybacking): una persona no autorizada sigue a una autorizada a través de una puerta. Característica clave: derrota badges y biometría; se mitiga con esclusas, torniquetes y…</a:t>
+            </a:r>
+          </a:p>
+          <a:p>
+            <a:pPr>
+              <a:spcAft>
+                <a:spcPts val="600"/>
+              </a:spcAft>
+            </a:pPr>
+            <a:r>
+              <a:rPr sz="1500">
+                <a:solidFill>
+                  <a:srgbClr val="22282E"/>
+                </a:solidFill>
+              </a:rPr>
+              <a:t>•  HVAC (Heating, Ventilation, Air Conditioning): sistema que mantiene temperatura (~18–27 °C según ASHRAE) y humedad relativa (40–60 %). Característica clave: exceso de humedad → corrosión; defecto →…</a:t>
+            </a:r>
+          </a:p>
+          <a:p>
+            <a:pPr>
+              <a:spcAft>
+                <a:spcPts val="600"/>
+              </a:spcAft>
+            </a:pPr>
+            <a:r>
+              <a:rPr sz="1500">
+                <a:solidFill>
+                  <a:srgbClr val="22282E"/>
+                </a:solidFill>
+              </a:rPr>
+              <a:t>•  UPS (Uninterruptible Power Supply): batería que cubre el corte hasta que arranca el generador y acondiciona la energía (sags, spikes, brownouts). Característica clave: puente de segundos-minutos, no…</a:t>
+            </a:r>
+          </a:p>
+          <a:p>
+            <a:pPr>
+              <a:spcAft>
+                <a:spcPts val="600"/>
+              </a:spcAft>
+            </a:pPr>
+            <a:r>
+              <a:rPr sz="1500">
+                <a:solidFill>
+                  <a:srgbClr val="22282E"/>
+                </a:solidFill>
+              </a:rPr>
+              <a:t>•  Supresión limpia (clean agent, p. ej. FM-200/Novec 1230): apaga incendios sin residuos ni daño a electrónica, a diferencia del agua. Característica clave: protege equipos; requiere control de…</a:t>
             </a:r>
           </a:p>
         </p:txBody>
@@ -4808,7 +5214,7 @@
                   <a:srgbClr val="0B3D2E"/>
                 </a:solidFill>
               </a:rPr>
-              <a:t>📝 Reto verificable</a:t>
+              <a:t>🧰 Herramientas y preparación</a:t>
             </a:r>
           </a:p>
         </p:txBody>
@@ -4846,82 +5252,82 @@
                   <a:srgbClr val="22282E"/>
                 </a:solidFill>
               </a:rPr>
-              <a:t>•  Reto: produce el informe de evaluación física de una sala de equipos (real o sobre plano) con mapa de capas y tabla de hallazgos priorizada.</a:t>
-            </a:r>
-          </a:p>
-          <a:p>
-            <a:pPr>
-              <a:spcAft>
-                <a:spcPts val="600"/>
-              </a:spcAft>
-            </a:pPr>
-            <a:r>
-              <a:rPr sz="1500">
-                <a:solidFill>
-                  <a:srgbClr val="22282E"/>
-                </a:solidFill>
-              </a:rPr>
-              <a:t>•  Criterio de aceptación:</a:t>
-            </a:r>
-          </a:p>
-          <a:p>
-            <a:pPr>
-              <a:spcAft>
-                <a:spcPts val="600"/>
-              </a:spcAft>
-            </a:pPr>
-            <a:r>
-              <a:rPr sz="1500">
-                <a:solidFill>
-                  <a:srgbClr val="22282E"/>
-                </a:solidFill>
-              </a:rPr>
-              <a:t>•  El mapa muestra al menos 4 capas de defensa en profundidad.</a:t>
-            </a:r>
-          </a:p>
-          <a:p>
-            <a:pPr>
-              <a:spcAft>
-                <a:spcPts val="600"/>
-              </a:spcAft>
-            </a:pPr>
-            <a:r>
-              <a:rPr sz="1500">
-                <a:solidFill>
-                  <a:srgbClr val="22282E"/>
-                </a:solidFill>
-              </a:rPr>
-              <a:t>•  Cada hallazgo tiene estado, nivel de riesgo (P×I) y recomendación accionable.</a:t>
-            </a:r>
-          </a:p>
-          <a:p>
-            <a:pPr>
-              <a:spcAft>
-                <a:spcPts val="600"/>
-              </a:spcAft>
-            </a:pPr>
-            <a:r>
-              <a:rPr sz="1500">
-                <a:solidFill>
-                  <a:srgbClr val="22282E"/>
-                </a:solidFill>
-              </a:rPr>
-              <a:t>•  Se evalúan las tres dimensiones ambientales: acceso, clima (HVAC) y energía.</a:t>
-            </a:r>
-          </a:p>
-          <a:p>
-            <a:pPr>
-              <a:spcAft>
-                <a:spcPts val="600"/>
-              </a:spcAft>
-            </a:pPr>
-            <a:r>
-              <a:rPr sz="1500">
-                <a:solidFill>
-                  <a:srgbClr val="22282E"/>
-                </a:solidFill>
-              </a:rPr>
-              <a:t>•  Cada recomendación referencia un control de la familia PE de NIST SP 800-53.</a:t>
+              <a:t>•  Clase de evaluación de instalaciones; herramientas de campo y documentación:</a:t>
+            </a:r>
+          </a:p>
+          <a:p>
+            <a:pPr>
+              <a:spcAft>
+                <a:spcPts val="600"/>
+              </a:spcAft>
+            </a:pPr>
+            <a:r>
+              <a:rPr sz="1500">
+                <a:solidFill>
+                  <a:srgbClr val="22282E"/>
+                </a:solidFill>
+              </a:rPr>
+              <a:t>•  Plano del sitio / floor plan (draw.io o PDF del edificio) para marcar capas y controles.</a:t>
+            </a:r>
+          </a:p>
+          <a:p>
+            <a:pPr>
+              <a:spcAft>
+                <a:spcPts val="600"/>
+              </a:spcAft>
+            </a:pPr>
+            <a:r>
+              <a:rPr sz="1500">
+                <a:solidFill>
+                  <a:srgbClr val="22282E"/>
+                </a:solidFill>
+              </a:rPr>
+              <a:t>•  Lista de verificación basada en NIST SP 800-53 (familia PE — Physical and Environmental Protection).</a:t>
+            </a:r>
+          </a:p>
+          <a:p>
+            <a:pPr>
+              <a:spcAft>
+                <a:spcPts val="600"/>
+              </a:spcAft>
+            </a:pPr>
+            <a:r>
+              <a:rPr sz="1500">
+                <a:solidFill>
+                  <a:srgbClr val="22282E"/>
+                </a:solidFill>
+              </a:rPr>
+              <a:t>•  Termómetro/higrómetro o sensor IoT para medir condiciones reales de una sala de equipos.</a:t>
+            </a:r>
+          </a:p>
+          <a:p>
+            <a:pPr>
+              <a:spcAft>
+                <a:spcPts val="600"/>
+              </a:spcAft>
+            </a:pPr>
+            <a:r>
+              <a:rPr sz="1500">
+                <a:solidFill>
+                  <a:srgbClr val="22282E"/>
+                </a:solidFill>
+              </a:rPr>
+              <a:t>•  Cámara para documentar hallazgos (con autorización de la organización).</a:t>
+            </a:r>
+          </a:p>
+          <a:p>
+            <a:pPr>
+              <a:spcAft>
+                <a:spcPts val="600"/>
+              </a:spcAft>
+            </a:pPr>
+            <a:r>
+              <a:rPr sz="1500">
+                <a:solidFill>
+                  <a:srgbClr val="22282E"/>
+                </a:solidFill>
+              </a:rPr>
+              <a:t>•  Estándar ASHRAE TC 9.9 como referencia de rangos térmicos para datacenters.</a:t>
             </a:r>
           </a:p>
         </p:txBody>
